--- a/en/slides/07-Computer_Architecture-Verm1_Part_1.pptx
+++ b/en/slides/07-Computer_Architecture-Verm1_Part_1.pptx
@@ -119,31 +119,31 @@
   <p:extLst>
     <p:ext uri="{521415D9-36F7-43E2-AB2F-B90AF26B5E84}">
       <p14:sectionLst xmlns:p14="http://schemas.microsoft.com/office/powerpoint/2010/main">
-        <p14:section name="Opening" id="{d5e2576c-5c13-d78a-91c9-155f5d080127}">
+        <p14:section name="Opening" id="{4cd56c86-c18c-836d-4ae8-1ed157ca0584}">
           <p14:sldIdLst>
             <p14:sldId id="256"/>
             <p14:sldId id="257"/>
           </p14:sldIdLst>
         </p14:section>
-        <p14:section name="The project" id="{b11deecf-5dff-93a0-a9f5-750532c73d96}">
+        <p14:section name="The project" id="{8e128314-9df3-d286-3014-a44c3f9bea75}">
           <p14:sldIdLst>
             <p14:sldId id="258"/>
             <p14:sldId id="259"/>
             <p14:sldId id="260"/>
           </p14:sldIdLst>
         </p14:section>
-        <p14:section name="Step 2: a grid and a head" id="{53f0ead6-ee98-1afc-8e1a-eac326a664b5}">
+        <p14:section name="Step 2: a grid and a head" id="{2574d77f-4738-da38-7532-87d7cbddb57f}">
           <p14:sldIdLst>
             <p14:sldId id="261"/>
           </p14:sldIdLst>
         </p14:section>
-        <p14:section name="Step 3: movement" id="{faa15779-6f13-77cd-fe81-e10e95e43f22}">
+        <p14:section name="Step 3: movement" id="{00d30ce9-fcda-b95c-deef-aafe6949be8e}">
           <p14:sldIdLst>
             <p14:sldId id="262"/>
             <p14:sldId id="263"/>
           </p14:sldIdLst>
         </p14:section>
-        <p14:section name="Step 4: look inside with PRG32-QT" id="{37a69043-b053-a888-0f9c-c6edf6c17c9d}">
+        <p14:section name="Step 4: look inside with PRG32-QT" id="{5a87920d-0990-deac-12ee-72b217e91f15}">
           <p14:sldIdLst>
             <p14:sldId id="264"/>
             <p14:sldId id="265"/>
@@ -2694,7 +2694,63 @@
       </p:sp>
       <p:sp>
         <p:nvSpPr>
-          <p:cNvPr id="13" name="Shape 11"/>
+          <p:cNvPr id="13" name="Text 11"/>
+          <p:cNvSpPr txBox="1"/>
+          <p:nvPr/>
+        </p:nvSpPr>
+        <p:spPr>
+          <a:xfrm>
+            <a:off x="4693615" y="566928"/>
+            <a:ext cx="6949440" cy="640080"/>
+          </a:xfrm>
+          <a:prstGeom prst="rect">
+            <a:avLst/>
+          </a:prstGeom>
+          <a:noFill/>
+          <a:ln/>
+        </p:spPr>
+        <p:txBody>
+          <a:bodyPr wrap="square" lIns="0" tIns="0" rIns="0" bIns="0" rtlCol="0" anchor="t"/>
+          <a:lstStyle/>
+          <a:p>
+            <a:pPr algn="r" indent="0" marL="0">
+              <a:buNone/>
+            </a:pPr>
+            <a:r>
+              <a:rPr lang="en-US" sz="1300" dirty="0">
+                <a:solidFill>
+                  <a:srgbClr val="CFE3EA"/>
+                </a:solidFill>
+                <a:latin typeface="Calibri" pitchFamily="34" charset="0"/>
+                <a:ea typeface="Calibri" pitchFamily="34" charset="-122"/>
+                <a:cs typeface="Calibri" pitchFamily="34" charset="-120"/>
+              </a:rPr>
+              <a:t>Lecture deck. The listings, the complete program and how to test it are in the code deck:</a:t>
+            </a:r>
+            <a:endParaRPr lang="en-US" sz="1300" dirty="0"/>
+          </a:p>
+          <a:p>
+            <a:pPr algn="r" indent="0" marL="0">
+              <a:buNone/>
+            </a:pPr>
+            <a:r>
+              <a:rPr lang="en-US" sz="1300" dirty="0">
+                <a:solidFill>
+                  <a:srgbClr val="CFE3EA"/>
+                </a:solidFill>
+                <a:latin typeface="Calibri" pitchFamily="34" charset="0"/>
+                <a:ea typeface="Calibri" pitchFamily="34" charset="-122"/>
+                <a:cs typeface="Calibri" pitchFamily="34" charset="-120"/>
+              </a:rPr>
+              <a:t>07-Computer_Architecture-Verm1_Part_1-Code.pptx</a:t>
+            </a:r>
+            <a:endParaRPr lang="en-US" sz="1300" dirty="0"/>
+          </a:p>
+        </p:txBody>
+      </p:sp>
+      <p:sp>
+        <p:nvSpPr>
+          <p:cNvPr id="14" name="Shape 12"/>
           <p:cNvSpPr/>
           <p:nvPr/>
         </p:nvSpPr>
@@ -2721,7 +2777,7 @@
       </p:sp>
       <p:pic>
         <p:nvPicPr>
-          <p:cNvPr id="14" name="Image 0" descr="/Users/raffaelemontella/devel/riscv-prg32/computer-architecture-with-prg32/tools/assets/verm1_p1.png">    </p:cNvPr>
+          <p:cNvPr id="15" name="Image 0" descr="/Users/raffaelemontella/devel/riscv-prg32/computer-architecture-with-prg32/tools/assets/verm1_p1.png">    </p:cNvPr>
           <p:cNvPicPr>
             <a:picLocks noChangeAspect="1"/>
           </p:cNvPicPr>

--- a/en/slides/07-Computer_Architecture-Verm1_Part_1.pptx
+++ b/en/slides/07-Computer_Architecture-Verm1_Part_1.pptx
@@ -119,31 +119,31 @@
   <p:extLst>
     <p:ext uri="{521415D9-36F7-43E2-AB2F-B90AF26B5E84}">
       <p14:sectionLst xmlns:p14="http://schemas.microsoft.com/office/powerpoint/2010/main">
-        <p14:section name="Opening" id="{4cd56c86-c18c-836d-4ae8-1ed157ca0584}">
+        <p14:section name="Opening" id="{209ee759-7dc8-86cd-b97b-574b7ad131d4}">
           <p14:sldIdLst>
             <p14:sldId id="256"/>
             <p14:sldId id="257"/>
           </p14:sldIdLst>
         </p14:section>
-        <p14:section name="The project" id="{8e128314-9df3-d286-3014-a44c3f9bea75}">
+        <p14:section name="The project" id="{60621edd-8256-7cfd-8648-b3d1d74edd7b}">
           <p14:sldIdLst>
             <p14:sldId id="258"/>
             <p14:sldId id="259"/>
             <p14:sldId id="260"/>
           </p14:sldIdLst>
         </p14:section>
-        <p14:section name="Step 2: a grid and a head" id="{2574d77f-4738-da38-7532-87d7cbddb57f}">
+        <p14:section name="Step 2: a grid and a head" id="{2c7bf4a0-8446-a32b-c34d-70c20d914b26}">
           <p14:sldIdLst>
             <p14:sldId id="261"/>
           </p14:sldIdLst>
         </p14:section>
-        <p14:section name="Step 3: movement" id="{00d30ce9-fcda-b95c-deef-aafe6949be8e}">
+        <p14:section name="Step 3: movement" id="{9e7993c6-dd0b-2763-075f-9707e229bc6d}">
           <p14:sldIdLst>
             <p14:sldId id="262"/>
             <p14:sldId id="263"/>
           </p14:sldIdLst>
         </p14:section>
-        <p14:section name="Step 4: look inside with PRG32-QT" id="{5a87920d-0990-deac-12ee-72b217e91f15}">
+        <p14:section name="Step 4: look inside with PRG32-QT" id="{6719e2dc-dace-1fe1-bb7b-fb639d926ed1}">
           <p14:sldIdLst>
             <p14:sldId id="264"/>
             <p14:sldId id="265"/>
@@ -557,6 +557,8 @@
             <a:r>
               <a:rPr lang="en-US" dirty="0"/>
               <a:t>The project of the course starts here. This is a tutorial, not a lecture: you type a program, step by step, and at the end it runs. It uses only what the lectures from 02 to 06 have taught: registers and memory, colours and strings as numbers, comparisons and shifts, fixed point. The picture on the cover is what you will have on your screen in two hours: a title and a green square, the head of the worm, that crosses the screen by itself. The reference implementation was contributed by Giuseppe Coviello.
+Learning status: UNDERSTAND NOW, by the end of this lecture you explain it, trace it and apply it on your own; USE NOW, you follow and use the recipe today; how it works inside is explained later, or is not part of the course; UNDERSTAND LATER, recognise the name and what it is for; a later lecture explains it. A slide without a badge is context: a story, an example, a question, an exercise.
+Learning status of this lecture. UNDERSTAND NOW: the Verm1 project; the init, update, draw contract; a colour is a number; arrays in memory; .text, .rodata, .data; address, value, load, store; why ra is saved; shifts as multiplications; fixed point; pseudo-instructions; little-endian byte order. USE NOW: the PRG32 tools, the PRG32-QT debugger (used, not studied, in this course). UNDERSTAND LATER: instruction formats (Lecture 19). A slide without a badge is context: a story, an example, a question, an exercise.
 For the lecturer: First project tutorial. It uses only Lectures 02 to 06: registers, load and store, calls (02), strings and colours (04), integers, comparisons and wrap-around (05), fixed point (06), and a little history (03). The students type the program themselves; the reference file is verm1/verm1_part1.S. Everything on the code slides is read from that file, which is built and run automatically.</a:t>
             </a:r>
             <a:endParaRPr lang="en-US" dirty="0"/>
@@ -646,6 +648,7 @@
             <a:r>
               <a:rPr lang="en-US" dirty="0"/>
               <a:t>The memory view shows 128 bytes in hexadecimal starting from the address you typed. A word occupies four bytes, least significant first: when step_q8 is 240 you read F0 00 00 00. This is the little-endian order of Lecture 04, seen live. The variables are in memory in the order of the file: head_x, head_y, step_q8, so the head's column is eight bytes before the fraction. The debugger only observes: to change the program you edit, build and run.
+UNDERSTAND NOW: little-endian byte order.
 For the lecturer: Byte order: Lecture 04. In the file the order is head_x, head_y, step_q8, each four bytes: if step_q8 is at address A, head_x is at A - 8.</a:t>
             </a:r>
             <a:endParaRPr lang="en-US" dirty="0"/>
@@ -915,6 +918,7 @@
             <a:r>
               <a:rPr lang="en-US" dirty="0"/>
               <a:t>Where you are. You have a cartridge that runs and that you understand line by line. It already has the shape of every game: a state in memory, a rule that changes it at every frame, and a function that draws it. What is missing is the player: the head goes where it wants. The next four lectures give the tools to read the joystick and to decide, bits, masks and tables, and Part 2 uses them to add steering, food and a score.
+Learning status, recap. UNDERSTAND NOW: the Verm1 project; the init, update, draw contract; a colour is a number; arrays in memory; .text, .rodata, .data; address, value, load, store; why ra is saved; shifts as multiplications; fixed point; pseudo-instructions; little-endian byte order. USE NOW: the PRG32 tools, the PRG32-QT debugger (used, not studied, in this course). UNDERSTAND LATER: instruction formats (Lecture 19). A slide without a badge is context: a story, an example, a question, an exercise.
 For the lecturer: Reference file for this part: verm1/verm1_part1.S (78 lines). If a student's program does not work at the start of Part 2, they start from this file.</a:t>
             </a:r>
             <a:endParaRPr lang="en-US" dirty="0"/>
@@ -1092,6 +1096,7 @@
             <a:r>
               <a:rPr lang="en-US" dirty="0"/>
               <a:t>Verm1, read "vermone", is a tribute to Snake: a worm that moves on a grid, eats, grows and must not bite itself. The idea goes back to the arcade game Blockade of 1976 and became famous on the Nokia phones of 1997. It was chosen because it is small enough to be written from scratch in assembly and yet needs every topic of the course. You write every line; there is no engine underneath. The picture on the right is where you will arrive in Part 4.
+UNDERSTAND NOW: the Verm1 project.
 For the lecturer: Snake for the Nokia 6110 was written by Taneli Armanto. Verm1 is a tribute, not a copy: the name, the rules of detail and the look are ours. The reference implementation that the tutorials follow was contributed by Giuseppe Coviello.</a:t>
             </a:r>
             <a:endParaRPr lang="en-US" dirty="0"/>
@@ -1181,6 +1186,7 @@
             <a:r>
               <a:rPr lang="en-US" dirty="0"/>
               <a:t>The plan of the project. Each row is a tutorial, what you add in it and the lectures it uses. Part 1, today: a grid, a head, automatic movement. Part 2, Lecture 12: steering, food, a score. Part 3, Lecture 17: a body that grows and collisions. Part 4, Lecture 22: the finished game. Lecture 23 prepares the bundle for the Store. One rule, from the notes of the lecturer, applies to every part: never start with a program that does not run; if yours is broken, start from the reference file.
+UNDERSTAND NOW: the Verm1 project.
 For the lecturer: Each part ends with a program that runs. Never start a part with a program that does not: if yours is broken, start from the reference file of the previous part.</a:t>
             </a:r>
             <a:endParaRPr lang="en-US" dirty="0"/>
@@ -1358,6 +1364,7 @@
             <a:r>
               <a:rPr lang="en-US" dirty="0"/>
               <a:t>The worm does not live in pixels: it lives in cells. A position is a column from 0 to 39 and a row from 0 to 23, and the head starts in column 5 of row 12, the bright cell in the drawing. To draw a cell its coordinates are turned into pixels: x is the column times 8, a shift left by 3; y is the row times 8 plus 8, because the title line comes first. Thinking in cells makes all the later rules simple: moving is adding 1, and two things collide when their cells are equal.
+UNDERSTAND NOW: arrays in memory.
 For the lecturer: Draw the grid on the board and ask for the pixel coordinates of a few cells: (0,0) is at (0,8); (39,23) is at (312,192).</a:t>
             </a:r>
             <a:endParaRPr lang="en-US" dirty="0"/>
@@ -1447,6 +1454,7 @@
             <a:r>
               <a:rPr lang="en-US" dirty="0"/>
               <a:t>update runs about thirty times per second. At one cell per frame the head would cross the forty columns in little more than a second. We want a fraction of a cell per frame. So we keep a fraction in units of 1/256 of a cell, add the speed to it at every frame, and take a step each time a whole cell, 256, has accumulated. With SPEED_Q8 equal to 40 the head advances 40/256 of a cell per frame: one step about every six frames. The remainder is kept, so on average the speed is exact.
+UNDERSTAND NOW: fixed point.
 For the lecturer: This is the ball of Lecture 06, turned into a timer. The remainder is kept, so the average speed is exact: 256 frames give exactly 40 steps.</a:t>
             </a:r>
             <a:endParaRPr lang="en-US" dirty="0"/>
@@ -1536,6 +1544,7 @@
             <a:r>
               <a:rPr lang="en-US" dirty="0"/>
               <a:t>A trace by hand, the most useful exercise of the tutorial. At each frame 40 is added to the fraction. At frames 1 to 6 the sum stays below 256 and the head does not move. At frame 7 it reaches 280: a whole cell has accumulated, 256 is subtracted, 24 remains, and the head goes from column 5 to column 6. The steps come every six or seven frames, and the remainder carries the difference, like the extra day of a leap year. Fill in frames 8 to 12 yourself.
+UNDERSTAND NOW: fixed point.
 For the lecturer: After 64 frames the sum is 64 x 40 = 2560 = 10 x 256: ten steps, head in column 15, exactly what the screenshot shows. Ask the students to fill in frames 8 to 12.</a:t>
             </a:r>
             <a:endParaRPr lang="en-US" dirty="0"/>
@@ -1625,6 +1634,7 @@
             <a:r>
               <a:rPr lang="en-US" dirty="0"/>
               <a:t>A precise procedure. Enable the debug mode in Settings and run the cartridge. Press Update: the listing shows verm1_update. Click in the gutter beside its first instruction to set a breakpoint: the program stops there at the next frame. Now step, one instruction at a time, and watch the registers. After the two instructions that implement la, t0 holds an address: type it in the Memory field and you will see the bytes of step_q8. Each Resume runs one frame, and the value grows by 40, 0x28.
+USE NOW: the PRG32-QT debugger (used, not studied, in this course).
 For the lecturer: From the PRG32-QT debugging guide: pause, resume, step; Init / Update / Draw / PC views; gutter breakpoints; a 128-byte memory view. Resume ignores the current breakpoint once, so each press of Resume runs one whole frame.</a:t>
             </a:r>
             <a:endParaRPr lang="en-US" dirty="0"/>
@@ -2801,6 +2811,420 @@
       </p:pic>
       <p:sp>
         <p:nvSpPr>
+          <p:cNvPr id="16" name="Shape 13"/>
+          <p:cNvSpPr/>
+          <p:nvPr/>
+        </p:nvSpPr>
+        <p:spPr>
+          <a:xfrm>
+            <a:off x="9690303" y="91440"/>
+            <a:ext cx="1952752" cy="274320"/>
+          </a:xfrm>
+          <a:prstGeom prst="rect">
+            <a:avLst/>
+          </a:prstGeom>
+          <a:solidFill>
+            <a:srgbClr val="F3E8FF"/>
+          </a:solidFill>
+          <a:ln w="12700">
+            <a:solidFill>
+              <a:srgbClr val="7E22CE"/>
+            </a:solidFill>
+            <a:prstDash val="dash"/>
+          </a:ln>
+        </p:spPr>
+      </p:sp>
+      <p:sp>
+        <p:nvSpPr>
+          <p:cNvPr id="17" name="Shape 14"/>
+          <p:cNvSpPr/>
+          <p:nvPr/>
+        </p:nvSpPr>
+        <p:spPr>
+          <a:xfrm>
+            <a:off x="9717735" y="128016"/>
+            <a:ext cx="45720" cy="45720"/>
+          </a:xfrm>
+          <a:prstGeom prst="rect">
+            <a:avLst/>
+          </a:prstGeom>
+          <a:solidFill>
+            <a:srgbClr val="7E22CE"/>
+          </a:solidFill>
+          <a:ln w="12700">
+            <a:solidFill>
+              <a:srgbClr val="7E22CE"/>
+            </a:solidFill>
+            <a:prstDash val="solid"/>
+          </a:ln>
+        </p:spPr>
+      </p:sp>
+      <p:sp>
+        <p:nvSpPr>
+          <p:cNvPr id="18" name="Shape 15"/>
+          <p:cNvSpPr/>
+          <p:nvPr/>
+        </p:nvSpPr>
+        <p:spPr>
+          <a:xfrm>
+            <a:off x="9717735" y="205740"/>
+            <a:ext cx="45720" cy="45720"/>
+          </a:xfrm>
+          <a:prstGeom prst="rect">
+            <a:avLst/>
+          </a:prstGeom>
+          <a:solidFill>
+            <a:srgbClr val="7E22CE"/>
+          </a:solidFill>
+          <a:ln w="12700">
+            <a:solidFill>
+              <a:srgbClr val="7E22CE"/>
+            </a:solidFill>
+            <a:prstDash val="solid"/>
+          </a:ln>
+        </p:spPr>
+      </p:sp>
+      <p:sp>
+        <p:nvSpPr>
+          <p:cNvPr id="19" name="Shape 16"/>
+          <p:cNvSpPr/>
+          <p:nvPr/>
+        </p:nvSpPr>
+        <p:spPr>
+          <a:xfrm>
+            <a:off x="9717735" y="283464"/>
+            <a:ext cx="45720" cy="45720"/>
+          </a:xfrm>
+          <a:prstGeom prst="rect">
+            <a:avLst/>
+          </a:prstGeom>
+          <a:solidFill>
+            <a:srgbClr val="7E22CE"/>
+          </a:solidFill>
+          <a:ln w="12700">
+            <a:solidFill>
+              <a:srgbClr val="7E22CE"/>
+            </a:solidFill>
+            <a:prstDash val="solid"/>
+          </a:ln>
+        </p:spPr>
+      </p:sp>
+      <p:pic>
+        <p:nvPicPr>
+          <p:cNvPr id="20" name="Image 1" descr="preencoded.png">    </p:cNvPr>
+          <p:cNvPicPr>
+            <a:picLocks noChangeAspect="1"/>
+          </p:cNvPicPr>
+          <p:nvPr/>
+        </p:nvPicPr>
+        <p:blipFill>
+          <a:blip r:embed="rId2"/>
+          <a:stretch>
+            <a:fillRect/>
+          </a:stretch>
+        </p:blipFill>
+        <p:spPr>
+          <a:xfrm>
+            <a:off x="9818319" y="128016"/>
+            <a:ext cx="201168" cy="201168"/>
+          </a:xfrm>
+          <a:prstGeom prst="rect">
+            <a:avLst/>
+          </a:prstGeom>
+        </p:spPr>
+      </p:pic>
+      <p:sp>
+        <p:nvSpPr>
+          <p:cNvPr id="21" name="Text 17"/>
+          <p:cNvSpPr txBox="1"/>
+          <p:nvPr/>
+        </p:nvSpPr>
+        <p:spPr>
+          <a:xfrm>
+            <a:off x="10074351" y="91440"/>
+            <a:ext cx="1532128" cy="274320"/>
+          </a:xfrm>
+          <a:prstGeom prst="rect">
+            <a:avLst/>
+          </a:prstGeom>
+          <a:noFill/>
+          <a:ln/>
+        </p:spPr>
+        <p:txBody>
+          <a:bodyPr wrap="square" lIns="0" tIns="0" rIns="0" bIns="0" rtlCol="0" anchor="ctr"/>
+          <a:lstStyle/>
+          <a:p>
+            <a:pPr indent="0" marL="0">
+              <a:buNone/>
+            </a:pPr>
+            <a:r>
+              <a:rPr lang="en-US" sz="1100" b="1" dirty="0">
+                <a:solidFill>
+                  <a:srgbClr val="6B21A8"/>
+                </a:solidFill>
+                <a:latin typeface="Calibri" pitchFamily="34" charset="0"/>
+                <a:ea typeface="Calibri" pitchFamily="34" charset="-122"/>
+                <a:cs typeface="Calibri" pitchFamily="34" charset="-120"/>
+              </a:rPr>
+              <a:t>UNDERSTAND LATER</a:t>
+            </a:r>
+            <a:endParaRPr lang="en-US" sz="1100" dirty="0"/>
+          </a:p>
+        </p:txBody>
+      </p:sp>
+      <p:sp>
+        <p:nvSpPr>
+          <p:cNvPr id="22" name="Shape 18"/>
+          <p:cNvSpPr/>
+          <p:nvPr/>
+        </p:nvSpPr>
+        <p:spPr>
+          <a:xfrm>
+            <a:off x="8407349" y="91440"/>
+            <a:ext cx="1173226" cy="274320"/>
+          </a:xfrm>
+          <a:prstGeom prst="rect">
+            <a:avLst/>
+          </a:prstGeom>
+          <a:solidFill>
+            <a:srgbClr val="FEF3C7"/>
+          </a:solidFill>
+          <a:ln w="12700">
+            <a:solidFill>
+              <a:srgbClr val="B45309"/>
+            </a:solidFill>
+            <a:prstDash val="solid"/>
+          </a:ln>
+        </p:spPr>
+      </p:sp>
+      <p:sp>
+        <p:nvSpPr>
+          <p:cNvPr id="23" name="Shape 19"/>
+          <p:cNvSpPr/>
+          <p:nvPr/>
+        </p:nvSpPr>
+        <p:spPr>
+          <a:xfrm>
+            <a:off x="8407349" y="91440"/>
+            <a:ext cx="27432" cy="274320"/>
+          </a:xfrm>
+          <a:prstGeom prst="rect">
+            <a:avLst/>
+          </a:prstGeom>
+          <a:solidFill>
+            <a:srgbClr val="B45309"/>
+          </a:solidFill>
+          <a:ln w="12700">
+            <a:solidFill>
+              <a:srgbClr val="B45309"/>
+            </a:solidFill>
+            <a:prstDash val="solid"/>
+          </a:ln>
+        </p:spPr>
+      </p:sp>
+      <p:sp>
+        <p:nvSpPr>
+          <p:cNvPr id="24" name="Shape 20"/>
+          <p:cNvSpPr/>
+          <p:nvPr/>
+        </p:nvSpPr>
+        <p:spPr>
+          <a:xfrm>
+            <a:off x="8462213" y="91440"/>
+            <a:ext cx="27432" cy="274320"/>
+          </a:xfrm>
+          <a:prstGeom prst="rect">
+            <a:avLst/>
+          </a:prstGeom>
+          <a:solidFill>
+            <a:srgbClr val="B45309"/>
+          </a:solidFill>
+          <a:ln w="12700">
+            <a:solidFill>
+              <a:srgbClr val="B45309"/>
+            </a:solidFill>
+            <a:prstDash val="solid"/>
+          </a:ln>
+        </p:spPr>
+      </p:sp>
+      <p:pic>
+        <p:nvPicPr>
+          <p:cNvPr id="25" name="Image 2" descr="preencoded.png">    </p:cNvPr>
+          <p:cNvPicPr>
+            <a:picLocks noChangeAspect="1"/>
+          </p:cNvPicPr>
+          <p:nvPr/>
+        </p:nvPicPr>
+        <p:blipFill>
+          <a:blip r:embed="rId3"/>
+          <a:stretch>
+            <a:fillRect/>
+          </a:stretch>
+        </p:blipFill>
+        <p:spPr>
+          <a:xfrm>
+            <a:off x="8535365" y="128016"/>
+            <a:ext cx="201168" cy="201168"/>
+          </a:xfrm>
+          <a:prstGeom prst="rect">
+            <a:avLst/>
+          </a:prstGeom>
+        </p:spPr>
+      </p:pic>
+      <p:sp>
+        <p:nvSpPr>
+          <p:cNvPr id="26" name="Text 21"/>
+          <p:cNvSpPr txBox="1"/>
+          <p:nvPr/>
+        </p:nvSpPr>
+        <p:spPr>
+          <a:xfrm>
+            <a:off x="8791397" y="91440"/>
+            <a:ext cx="752602" cy="274320"/>
+          </a:xfrm>
+          <a:prstGeom prst="rect">
+            <a:avLst/>
+          </a:prstGeom>
+          <a:noFill/>
+          <a:ln/>
+        </p:spPr>
+        <p:txBody>
+          <a:bodyPr wrap="square" lIns="0" tIns="0" rIns="0" bIns="0" rtlCol="0" anchor="ctr"/>
+          <a:lstStyle/>
+          <a:p>
+            <a:pPr indent="0" marL="0">
+              <a:buNone/>
+            </a:pPr>
+            <a:r>
+              <a:rPr lang="en-US" sz="1100" b="1" dirty="0">
+                <a:solidFill>
+                  <a:srgbClr val="92400E"/>
+                </a:solidFill>
+                <a:latin typeface="Calibri" pitchFamily="34" charset="0"/>
+                <a:ea typeface="Calibri" pitchFamily="34" charset="-122"/>
+                <a:cs typeface="Calibri" pitchFamily="34" charset="-120"/>
+              </a:rPr>
+              <a:t>USE NOW</a:t>
+            </a:r>
+            <a:endParaRPr lang="en-US" sz="1100" dirty="0"/>
+          </a:p>
+        </p:txBody>
+      </p:sp>
+      <p:sp>
+        <p:nvSpPr>
+          <p:cNvPr id="27" name="Shape 22"/>
+          <p:cNvSpPr/>
+          <p:nvPr/>
+        </p:nvSpPr>
+        <p:spPr>
+          <a:xfrm>
+            <a:off x="6518097" y="91440"/>
+            <a:ext cx="1779524" cy="274320"/>
+          </a:xfrm>
+          <a:prstGeom prst="rect">
+            <a:avLst/>
+          </a:prstGeom>
+          <a:solidFill>
+            <a:srgbClr val="E0F2FE"/>
+          </a:solidFill>
+          <a:ln w="12700">
+            <a:solidFill>
+              <a:srgbClr val="0369A1"/>
+            </a:solidFill>
+            <a:prstDash val="solid"/>
+          </a:ln>
+        </p:spPr>
+      </p:sp>
+      <p:sp>
+        <p:nvSpPr>
+          <p:cNvPr id="28" name="Shape 23"/>
+          <p:cNvSpPr/>
+          <p:nvPr/>
+        </p:nvSpPr>
+        <p:spPr>
+          <a:xfrm>
+            <a:off x="6518097" y="91440"/>
+            <a:ext cx="73152" cy="274320"/>
+          </a:xfrm>
+          <a:prstGeom prst="rect">
+            <a:avLst/>
+          </a:prstGeom>
+          <a:solidFill>
+            <a:srgbClr val="0369A1"/>
+          </a:solidFill>
+          <a:ln w="12700">
+            <a:solidFill>
+              <a:srgbClr val="0369A1"/>
+            </a:solidFill>
+            <a:prstDash val="solid"/>
+          </a:ln>
+        </p:spPr>
+      </p:sp>
+      <p:pic>
+        <p:nvPicPr>
+          <p:cNvPr id="29" name="Image 3" descr="preencoded.png">    </p:cNvPr>
+          <p:cNvPicPr>
+            <a:picLocks noChangeAspect="1"/>
+          </p:cNvPicPr>
+          <p:nvPr/>
+        </p:nvPicPr>
+        <p:blipFill>
+          <a:blip r:embed="rId4"/>
+          <a:stretch>
+            <a:fillRect/>
+          </a:stretch>
+        </p:blipFill>
+        <p:spPr>
+          <a:xfrm>
+            <a:off x="6646113" y="128016"/>
+            <a:ext cx="201168" cy="201168"/>
+          </a:xfrm>
+          <a:prstGeom prst="rect">
+            <a:avLst/>
+          </a:prstGeom>
+        </p:spPr>
+      </p:pic>
+      <p:sp>
+        <p:nvSpPr>
+          <p:cNvPr id="30" name="Text 24"/>
+          <p:cNvSpPr txBox="1"/>
+          <p:nvPr/>
+        </p:nvSpPr>
+        <p:spPr>
+          <a:xfrm>
+            <a:off x="6902145" y="91440"/>
+            <a:ext cx="1358900" cy="274320"/>
+          </a:xfrm>
+          <a:prstGeom prst="rect">
+            <a:avLst/>
+          </a:prstGeom>
+          <a:noFill/>
+          <a:ln/>
+        </p:spPr>
+        <p:txBody>
+          <a:bodyPr wrap="square" lIns="0" tIns="0" rIns="0" bIns="0" rtlCol="0" anchor="ctr"/>
+          <a:lstStyle/>
+          <a:p>
+            <a:pPr indent="0" marL="0">
+              <a:buNone/>
+            </a:pPr>
+            <a:r>
+              <a:rPr lang="en-US" sz="1100" b="1" dirty="0">
+                <a:solidFill>
+                  <a:srgbClr val="075985"/>
+                </a:solidFill>
+                <a:latin typeface="Calibri" pitchFamily="34" charset="0"/>
+                <a:ea typeface="Calibri" pitchFamily="34" charset="-122"/>
+                <a:cs typeface="Calibri" pitchFamily="34" charset="-120"/>
+              </a:rPr>
+              <a:t>UNDERSTAND NOW</a:t>
+            </a:r>
+            <a:endParaRPr lang="en-US" sz="1100" dirty="0"/>
+          </a:p>
+        </p:txBody>
+      </p:sp>
+      <p:sp>
+        <p:nvSpPr>
           <p:cNvPr id="25" name="Slide Number Placeholder 0"/>
           <p:cNvSpPr>
             <a:spLocks noGrp="1"/>
@@ -3313,6 +3737,133 @@
       </p:sp>
       <p:sp>
         <p:nvSpPr>
+          <p:cNvPr id="15" name="Shape 12"/>
+          <p:cNvSpPr/>
+          <p:nvPr/>
+        </p:nvSpPr>
+        <p:spPr>
+          <a:xfrm>
+            <a:off x="8090738" y="91440"/>
+            <a:ext cx="3552317" cy="274320"/>
+          </a:xfrm>
+          <a:prstGeom prst="rect">
+            <a:avLst/>
+          </a:prstGeom>
+          <a:solidFill>
+            <a:srgbClr val="E0F2FE"/>
+          </a:solidFill>
+          <a:ln w="12700">
+            <a:solidFill>
+              <a:srgbClr val="0369A1"/>
+            </a:solidFill>
+            <a:prstDash val="solid"/>
+          </a:ln>
+        </p:spPr>
+      </p:sp>
+      <p:sp>
+        <p:nvSpPr>
+          <p:cNvPr id="16" name="Shape 13"/>
+          <p:cNvSpPr/>
+          <p:nvPr/>
+        </p:nvSpPr>
+        <p:spPr>
+          <a:xfrm>
+            <a:off x="8090738" y="91440"/>
+            <a:ext cx="73152" cy="274320"/>
+          </a:xfrm>
+          <a:prstGeom prst="rect">
+            <a:avLst/>
+          </a:prstGeom>
+          <a:solidFill>
+            <a:srgbClr val="0369A1"/>
+          </a:solidFill>
+          <a:ln w="12700">
+            <a:solidFill>
+              <a:srgbClr val="0369A1"/>
+            </a:solidFill>
+            <a:prstDash val="solid"/>
+          </a:ln>
+        </p:spPr>
+      </p:sp>
+      <p:pic>
+        <p:nvPicPr>
+          <p:cNvPr id="17" name="Image 1" descr="preencoded.png">    </p:cNvPr>
+          <p:cNvPicPr>
+            <a:picLocks noChangeAspect="1"/>
+          </p:cNvPicPr>
+          <p:nvPr/>
+        </p:nvPicPr>
+        <p:blipFill>
+          <a:blip r:embed="rId2"/>
+          <a:stretch>
+            <a:fillRect/>
+          </a:stretch>
+        </p:blipFill>
+        <p:spPr>
+          <a:xfrm>
+            <a:off x="8218754" y="128016"/>
+            <a:ext cx="201168" cy="201168"/>
+          </a:xfrm>
+          <a:prstGeom prst="rect">
+            <a:avLst/>
+          </a:prstGeom>
+        </p:spPr>
+      </p:pic>
+      <p:sp>
+        <p:nvSpPr>
+          <p:cNvPr id="18" name="Text 14"/>
+          <p:cNvSpPr txBox="1"/>
+          <p:nvPr/>
+        </p:nvSpPr>
+        <p:spPr>
+          <a:xfrm>
+            <a:off x="8474786" y="91440"/>
+            <a:ext cx="3131693" cy="274320"/>
+          </a:xfrm>
+          <a:prstGeom prst="rect">
+            <a:avLst/>
+          </a:prstGeom>
+          <a:noFill/>
+          <a:ln/>
+        </p:spPr>
+        <p:txBody>
+          <a:bodyPr wrap="square" lIns="0" tIns="0" rIns="0" bIns="0" rtlCol="0" anchor="ctr"/>
+          <a:lstStyle/>
+          <a:p>
+            <a:pPr indent="0" marL="0">
+              <a:buNone/>
+            </a:pPr>
+            <a:r>
+              <a:rPr lang="en-US" sz="1100" b="1" dirty="0">
+                <a:solidFill>
+                  <a:srgbClr val="075985"/>
+                </a:solidFill>
+                <a:latin typeface="Calibri" pitchFamily="34" charset="0"/>
+                <a:ea typeface="Calibri" pitchFamily="34" charset="-122"/>
+                <a:cs typeface="Calibri" pitchFamily="34" charset="-120"/>
+              </a:rPr>
+              <a:t>UNDERSTAND NOW</a:t>
+            </a:r>
+            <a:pPr indent="0" marL="0">
+              <a:buNone/>
+            </a:pPr>
+            <a:r>
+              <a:rPr lang="en-US" sz="1100" dirty="0">
+                <a:solidFill>
+                  <a:srgbClr val="075985"/>
+                </a:solidFill>
+                <a:latin typeface="Calibri" pitchFamily="34" charset="0"/>
+                <a:ea typeface="Calibri" pitchFamily="34" charset="-122"/>
+                <a:cs typeface="Calibri" pitchFamily="34" charset="-120"/>
+              </a:rPr>
+              <a:t> · little-endian byte order</a:t>
+            </a:r>
+            <a:endParaRPr lang="en-US" sz="1100" dirty="0"/>
+          </a:p>
+        </p:txBody>
+      </p:sp>
+      <p:sp>
+        <p:nvSpPr>
           <p:cNvPr id="25" name="Slide Number Placeholder 0"/>
           <p:cNvSpPr>
             <a:spLocks noGrp="1"/>
@@ -6663,6 +7214,133 @@
               <a:t>Verm1 at the end of the course (Part 4)</a:t>
             </a:r>
             <a:endParaRPr lang="en-US" sz="1200" dirty="0"/>
+          </a:p>
+        </p:txBody>
+      </p:sp>
+      <p:sp>
+        <p:nvSpPr>
+          <p:cNvPr id="15" name="Shape 12"/>
+          <p:cNvSpPr/>
+          <p:nvPr/>
+        </p:nvSpPr>
+        <p:spPr>
+          <a:xfrm>
+            <a:off x="8550351" y="91440"/>
+            <a:ext cx="3092704" cy="274320"/>
+          </a:xfrm>
+          <a:prstGeom prst="rect">
+            <a:avLst/>
+          </a:prstGeom>
+          <a:solidFill>
+            <a:srgbClr val="E0F2FE"/>
+          </a:solidFill>
+          <a:ln w="12700">
+            <a:solidFill>
+              <a:srgbClr val="0369A1"/>
+            </a:solidFill>
+            <a:prstDash val="solid"/>
+          </a:ln>
+        </p:spPr>
+      </p:sp>
+      <p:sp>
+        <p:nvSpPr>
+          <p:cNvPr id="16" name="Shape 13"/>
+          <p:cNvSpPr/>
+          <p:nvPr/>
+        </p:nvSpPr>
+        <p:spPr>
+          <a:xfrm>
+            <a:off x="8550351" y="91440"/>
+            <a:ext cx="73152" cy="274320"/>
+          </a:xfrm>
+          <a:prstGeom prst="rect">
+            <a:avLst/>
+          </a:prstGeom>
+          <a:solidFill>
+            <a:srgbClr val="0369A1"/>
+          </a:solidFill>
+          <a:ln w="12700">
+            <a:solidFill>
+              <a:srgbClr val="0369A1"/>
+            </a:solidFill>
+            <a:prstDash val="solid"/>
+          </a:ln>
+        </p:spPr>
+      </p:sp>
+      <p:pic>
+        <p:nvPicPr>
+          <p:cNvPr id="17" name="Image 1" descr="preencoded.png">    </p:cNvPr>
+          <p:cNvPicPr>
+            <a:picLocks noChangeAspect="1"/>
+          </p:cNvPicPr>
+          <p:nvPr/>
+        </p:nvPicPr>
+        <p:blipFill>
+          <a:blip r:embed="rId2"/>
+          <a:stretch>
+            <a:fillRect/>
+          </a:stretch>
+        </p:blipFill>
+        <p:spPr>
+          <a:xfrm>
+            <a:off x="8678367" y="128016"/>
+            <a:ext cx="201168" cy="201168"/>
+          </a:xfrm>
+          <a:prstGeom prst="rect">
+            <a:avLst/>
+          </a:prstGeom>
+        </p:spPr>
+      </p:pic>
+      <p:sp>
+        <p:nvSpPr>
+          <p:cNvPr id="18" name="Text 14"/>
+          <p:cNvSpPr txBox="1"/>
+          <p:nvPr/>
+        </p:nvSpPr>
+        <p:spPr>
+          <a:xfrm>
+            <a:off x="8934399" y="91440"/>
+            <a:ext cx="2672080" cy="274320"/>
+          </a:xfrm>
+          <a:prstGeom prst="rect">
+            <a:avLst/>
+          </a:prstGeom>
+          <a:noFill/>
+          <a:ln/>
+        </p:spPr>
+        <p:txBody>
+          <a:bodyPr wrap="square" lIns="0" tIns="0" rIns="0" bIns="0" rtlCol="0" anchor="ctr"/>
+          <a:lstStyle/>
+          <a:p>
+            <a:pPr indent="0" marL="0">
+              <a:buNone/>
+            </a:pPr>
+            <a:r>
+              <a:rPr lang="en-US" sz="1100" b="1" dirty="0">
+                <a:solidFill>
+                  <a:srgbClr val="075985"/>
+                </a:solidFill>
+                <a:latin typeface="Calibri" pitchFamily="34" charset="0"/>
+                <a:ea typeface="Calibri" pitchFamily="34" charset="-122"/>
+                <a:cs typeface="Calibri" pitchFamily="34" charset="-120"/>
+              </a:rPr>
+              <a:t>UNDERSTAND NOW</a:t>
+            </a:r>
+            <a:pPr indent="0" marL="0">
+              <a:buNone/>
+            </a:pPr>
+            <a:r>
+              <a:rPr lang="en-US" sz="1100" dirty="0">
+                <a:solidFill>
+                  <a:srgbClr val="075985"/>
+                </a:solidFill>
+                <a:latin typeface="Calibri" pitchFamily="34" charset="0"/>
+                <a:ea typeface="Calibri" pitchFamily="34" charset="-122"/>
+                <a:cs typeface="Calibri" pitchFamily="34" charset="-120"/>
+              </a:rPr>
+              <a:t> · the Verm1 project</a:t>
+            </a:r>
+            <a:endParaRPr lang="en-US" sz="1100" dirty="0"/>
           </a:p>
         </p:txBody>
       </p:sp>
@@ -8049,6 +8727,133 @@
       </p:graphicFrame>
       <p:sp>
         <p:nvSpPr>
+          <p:cNvPr id="4" name="Shape 1"/>
+          <p:cNvSpPr/>
+          <p:nvPr/>
+        </p:nvSpPr>
+        <p:spPr>
+          <a:xfrm>
+            <a:off x="8550351" y="91440"/>
+            <a:ext cx="3092704" cy="274320"/>
+          </a:xfrm>
+          <a:prstGeom prst="rect">
+            <a:avLst/>
+          </a:prstGeom>
+          <a:solidFill>
+            <a:srgbClr val="E0F2FE"/>
+          </a:solidFill>
+          <a:ln w="12700">
+            <a:solidFill>
+              <a:srgbClr val="0369A1"/>
+            </a:solidFill>
+            <a:prstDash val="solid"/>
+          </a:ln>
+        </p:spPr>
+      </p:sp>
+      <p:sp>
+        <p:nvSpPr>
+          <p:cNvPr id="5" name="Shape 2"/>
+          <p:cNvSpPr/>
+          <p:nvPr/>
+        </p:nvSpPr>
+        <p:spPr>
+          <a:xfrm>
+            <a:off x="8550351" y="91440"/>
+            <a:ext cx="73152" cy="274320"/>
+          </a:xfrm>
+          <a:prstGeom prst="rect">
+            <a:avLst/>
+          </a:prstGeom>
+          <a:solidFill>
+            <a:srgbClr val="0369A1"/>
+          </a:solidFill>
+          <a:ln w="12700">
+            <a:solidFill>
+              <a:srgbClr val="0369A1"/>
+            </a:solidFill>
+            <a:prstDash val="solid"/>
+          </a:ln>
+        </p:spPr>
+      </p:sp>
+      <p:pic>
+        <p:nvPicPr>
+          <p:cNvPr id="6" name="Image 0" descr="preencoded.png">    </p:cNvPr>
+          <p:cNvPicPr>
+            <a:picLocks noChangeAspect="1"/>
+          </p:cNvPicPr>
+          <p:nvPr/>
+        </p:nvPicPr>
+        <p:blipFill>
+          <a:blip r:embed="rId1"/>
+          <a:stretch>
+            <a:fillRect/>
+          </a:stretch>
+        </p:blipFill>
+        <p:spPr>
+          <a:xfrm>
+            <a:off x="8678367" y="128016"/>
+            <a:ext cx="201168" cy="201168"/>
+          </a:xfrm>
+          <a:prstGeom prst="rect">
+            <a:avLst/>
+          </a:prstGeom>
+        </p:spPr>
+      </p:pic>
+      <p:sp>
+        <p:nvSpPr>
+          <p:cNvPr id="7" name="Text 3"/>
+          <p:cNvSpPr txBox="1"/>
+          <p:nvPr/>
+        </p:nvSpPr>
+        <p:spPr>
+          <a:xfrm>
+            <a:off x="8934399" y="91440"/>
+            <a:ext cx="2672080" cy="274320"/>
+          </a:xfrm>
+          <a:prstGeom prst="rect">
+            <a:avLst/>
+          </a:prstGeom>
+          <a:noFill/>
+          <a:ln/>
+        </p:spPr>
+        <p:txBody>
+          <a:bodyPr wrap="square" lIns="0" tIns="0" rIns="0" bIns="0" rtlCol="0" anchor="ctr"/>
+          <a:lstStyle/>
+          <a:p>
+            <a:pPr indent="0" marL="0">
+              <a:buNone/>
+            </a:pPr>
+            <a:r>
+              <a:rPr lang="en-US" sz="1100" b="1" dirty="0">
+                <a:solidFill>
+                  <a:srgbClr val="075985"/>
+                </a:solidFill>
+                <a:latin typeface="Calibri" pitchFamily="34" charset="0"/>
+                <a:ea typeface="Calibri" pitchFamily="34" charset="-122"/>
+                <a:cs typeface="Calibri" pitchFamily="34" charset="-120"/>
+              </a:rPr>
+              <a:t>UNDERSTAND NOW</a:t>
+            </a:r>
+            <a:pPr indent="0" marL="0">
+              <a:buNone/>
+            </a:pPr>
+            <a:r>
+              <a:rPr lang="en-US" sz="1100" dirty="0">
+                <a:solidFill>
+                  <a:srgbClr val="075985"/>
+                </a:solidFill>
+                <a:latin typeface="Calibri" pitchFamily="34" charset="0"/>
+                <a:ea typeface="Calibri" pitchFamily="34" charset="-122"/>
+                <a:cs typeface="Calibri" pitchFamily="34" charset="-120"/>
+              </a:rPr>
+              <a:t> · the Verm1 project</a:t>
+            </a:r>
+            <a:endParaRPr lang="en-US" sz="1100" dirty="0"/>
+          </a:p>
+        </p:txBody>
+      </p:sp>
+      <p:sp>
+        <p:nvSpPr>
           <p:cNvPr id="25" name="Slide Number Placeholder 0"/>
           <p:cNvSpPr>
             <a:spLocks noGrp="1"/>
@@ -9542,9 +10347,59 @@
           </a:p>
         </p:txBody>
       </p:sp>
+      <p:sp>
+        <p:nvSpPr>
+          <p:cNvPr id="3" name="Shape 1"/>
+          <p:cNvSpPr/>
+          <p:nvPr/>
+        </p:nvSpPr>
+        <p:spPr>
+          <a:xfrm>
+            <a:off x="8616010" y="91440"/>
+            <a:ext cx="3027045" cy="274320"/>
+          </a:xfrm>
+          <a:prstGeom prst="rect">
+            <a:avLst/>
+          </a:prstGeom>
+          <a:solidFill>
+            <a:srgbClr val="E0F2FE"/>
+          </a:solidFill>
+          <a:ln w="12700">
+            <a:solidFill>
+              <a:srgbClr val="0369A1"/>
+            </a:solidFill>
+            <a:prstDash val="solid"/>
+          </a:ln>
+        </p:spPr>
+      </p:sp>
+      <p:sp>
+        <p:nvSpPr>
+          <p:cNvPr id="4" name="Shape 2"/>
+          <p:cNvSpPr/>
+          <p:nvPr/>
+        </p:nvSpPr>
+        <p:spPr>
+          <a:xfrm>
+            <a:off x="8616010" y="91440"/>
+            <a:ext cx="73152" cy="274320"/>
+          </a:xfrm>
+          <a:prstGeom prst="rect">
+            <a:avLst/>
+          </a:prstGeom>
+          <a:solidFill>
+            <a:srgbClr val="0369A1"/>
+          </a:solidFill>
+          <a:ln w="12700">
+            <a:solidFill>
+              <a:srgbClr val="0369A1"/>
+            </a:solidFill>
+            <a:prstDash val="solid"/>
+          </a:ln>
+        </p:spPr>
+      </p:sp>
       <p:pic>
         <p:nvPicPr>
-          <p:cNvPr id="4" name="Image 0" descr="preencoded.png">    </p:cNvPr>
+          <p:cNvPr id="5" name="Image 0" descr="preencoded.png">    </p:cNvPr>
           <p:cNvPicPr>
             <a:picLocks noChangeAspect="1"/>
           </p:cNvPicPr>
@@ -9558,6 +10413,83 @@
         </p:blipFill>
         <p:spPr>
           <a:xfrm>
+            <a:off x="8744026" y="128016"/>
+            <a:ext cx="201168" cy="201168"/>
+          </a:xfrm>
+          <a:prstGeom prst="rect">
+            <a:avLst/>
+          </a:prstGeom>
+        </p:spPr>
+      </p:pic>
+      <p:sp>
+        <p:nvSpPr>
+          <p:cNvPr id="6" name="Text 3"/>
+          <p:cNvSpPr txBox="1"/>
+          <p:nvPr/>
+        </p:nvSpPr>
+        <p:spPr>
+          <a:xfrm>
+            <a:off x="9000058" y="91440"/>
+            <a:ext cx="2606421" cy="274320"/>
+          </a:xfrm>
+          <a:prstGeom prst="rect">
+            <a:avLst/>
+          </a:prstGeom>
+          <a:noFill/>
+          <a:ln/>
+        </p:spPr>
+        <p:txBody>
+          <a:bodyPr wrap="square" lIns="0" tIns="0" rIns="0" bIns="0" rtlCol="0" anchor="ctr"/>
+          <a:lstStyle/>
+          <a:p>
+            <a:pPr indent="0" marL="0">
+              <a:buNone/>
+            </a:pPr>
+            <a:r>
+              <a:rPr lang="en-US" sz="1100" b="1" dirty="0">
+                <a:solidFill>
+                  <a:srgbClr val="075985"/>
+                </a:solidFill>
+                <a:latin typeface="Calibri" pitchFamily="34" charset="0"/>
+                <a:ea typeface="Calibri" pitchFamily="34" charset="-122"/>
+                <a:cs typeface="Calibri" pitchFamily="34" charset="-120"/>
+              </a:rPr>
+              <a:t>UNDERSTAND NOW</a:t>
+            </a:r>
+            <a:pPr indent="0" marL="0">
+              <a:buNone/>
+            </a:pPr>
+            <a:r>
+              <a:rPr lang="en-US" sz="1100" dirty="0">
+                <a:solidFill>
+                  <a:srgbClr val="075985"/>
+                </a:solidFill>
+                <a:latin typeface="Calibri" pitchFamily="34" charset="0"/>
+                <a:ea typeface="Calibri" pitchFamily="34" charset="-122"/>
+                <a:cs typeface="Calibri" pitchFamily="34" charset="-120"/>
+              </a:rPr>
+              <a:t> · arrays in memory</a:t>
+            </a:r>
+            <a:endParaRPr lang="en-US" sz="1100" dirty="0"/>
+          </a:p>
+        </p:txBody>
+      </p:sp>
+      <p:pic>
+        <p:nvPicPr>
+          <p:cNvPr id="8" name="Image 1" descr="preencoded.png">    </p:cNvPr>
+          <p:cNvPicPr>
+            <a:picLocks noChangeAspect="1"/>
+          </p:cNvPicPr>
+          <p:nvPr/>
+        </p:nvPicPr>
+        <p:blipFill>
+          <a:blip r:embed="rId2"/>
+          <a:stretch>
+            <a:fillRect/>
+          </a:stretch>
+        </p:blipFill>
+        <p:spPr>
+          <a:xfrm>
             <a:off x="548640" y="1434168"/>
             <a:ext cx="6949440" cy="4721184"/>
           </a:xfrm>
@@ -9568,7 +10500,7 @@
       </p:pic>
       <p:sp>
         <p:nvSpPr>
-          <p:cNvPr id="5" name="Shape 1"/>
+          <p:cNvPr id="9" name="Shape 4"/>
           <p:cNvSpPr/>
           <p:nvPr/>
         </p:nvSpPr>
@@ -9593,7 +10525,7 @@
       </p:sp>
       <p:sp>
         <p:nvSpPr>
-          <p:cNvPr id="6" name="Text 2"/>
+          <p:cNvPr id="10" name="Text 5"/>
           <p:cNvSpPr txBox="1"/>
           <p:nvPr/>
         </p:nvSpPr>
@@ -9635,7 +10567,7 @@
       </p:sp>
       <p:sp>
         <p:nvSpPr>
-          <p:cNvPr id="7" name="Shape 3"/>
+          <p:cNvPr id="11" name="Shape 6"/>
           <p:cNvSpPr/>
           <p:nvPr/>
         </p:nvSpPr>
@@ -9660,7 +10592,7 @@
       </p:sp>
       <p:sp>
         <p:nvSpPr>
-          <p:cNvPr id="8" name="Text 4"/>
+          <p:cNvPr id="12" name="Text 7"/>
           <p:cNvSpPr txBox="1"/>
           <p:nvPr/>
         </p:nvSpPr>
@@ -9702,7 +10634,7 @@
       </p:sp>
       <p:sp>
         <p:nvSpPr>
-          <p:cNvPr id="9" name="Shape 5"/>
+          <p:cNvPr id="13" name="Shape 8"/>
           <p:cNvSpPr/>
           <p:nvPr/>
         </p:nvSpPr>
@@ -9727,7 +10659,7 @@
       </p:sp>
       <p:sp>
         <p:nvSpPr>
-          <p:cNvPr id="10" name="Text 6"/>
+          <p:cNvPr id="14" name="Text 9"/>
           <p:cNvSpPr txBox="1"/>
           <p:nvPr/>
         </p:nvSpPr>
@@ -9809,7 +10741,7 @@
       </p:sp>
       <p:sp>
         <p:nvSpPr>
-          <p:cNvPr id="11" name="Shape 7"/>
+          <p:cNvPr id="15" name="Shape 10"/>
           <p:cNvSpPr/>
           <p:nvPr/>
         </p:nvSpPr>
@@ -9834,7 +10766,7 @@
       </p:sp>
       <p:sp>
         <p:nvSpPr>
-          <p:cNvPr id="12" name="Text 8"/>
+          <p:cNvPr id="16" name="Text 11"/>
           <p:cNvSpPr txBox="1"/>
           <p:nvPr/>
         </p:nvSpPr>
@@ -9876,7 +10808,7 @@
       </p:sp>
       <p:sp>
         <p:nvSpPr>
-          <p:cNvPr id="13" name="Shape 9"/>
+          <p:cNvPr id="17" name="Shape 12"/>
           <p:cNvSpPr/>
           <p:nvPr/>
         </p:nvSpPr>
@@ -9901,7 +10833,7 @@
       </p:sp>
       <p:sp>
         <p:nvSpPr>
-          <p:cNvPr id="14" name="Text 10"/>
+          <p:cNvPr id="18" name="Text 13"/>
           <p:cNvSpPr txBox="1"/>
           <p:nvPr/>
         </p:nvSpPr>
@@ -10492,6 +11424,133 @@
               <a:t>of a cell per frame: a step when the sum passes 256, and the remainder is not thrown away</a:t>
             </a:r>
             <a:endParaRPr lang="en-US" sz="1900" dirty="0"/>
+          </a:p>
+        </p:txBody>
+      </p:sp>
+      <p:sp>
+        <p:nvSpPr>
+          <p:cNvPr id="16" name="Shape 14"/>
+          <p:cNvSpPr/>
+          <p:nvPr/>
+        </p:nvSpPr>
+        <p:spPr>
+          <a:xfrm>
+            <a:off x="8944305" y="91440"/>
+            <a:ext cx="2698750" cy="274320"/>
+          </a:xfrm>
+          <a:prstGeom prst="rect">
+            <a:avLst/>
+          </a:prstGeom>
+          <a:solidFill>
+            <a:srgbClr val="E0F2FE"/>
+          </a:solidFill>
+          <a:ln w="12700">
+            <a:solidFill>
+              <a:srgbClr val="0369A1"/>
+            </a:solidFill>
+            <a:prstDash val="solid"/>
+          </a:ln>
+        </p:spPr>
+      </p:sp>
+      <p:sp>
+        <p:nvSpPr>
+          <p:cNvPr id="17" name="Shape 15"/>
+          <p:cNvSpPr/>
+          <p:nvPr/>
+        </p:nvSpPr>
+        <p:spPr>
+          <a:xfrm>
+            <a:off x="8944305" y="91440"/>
+            <a:ext cx="73152" cy="274320"/>
+          </a:xfrm>
+          <a:prstGeom prst="rect">
+            <a:avLst/>
+          </a:prstGeom>
+          <a:solidFill>
+            <a:srgbClr val="0369A1"/>
+          </a:solidFill>
+          <a:ln w="12700">
+            <a:solidFill>
+              <a:srgbClr val="0369A1"/>
+            </a:solidFill>
+            <a:prstDash val="solid"/>
+          </a:ln>
+        </p:spPr>
+      </p:sp>
+      <p:pic>
+        <p:nvPicPr>
+          <p:cNvPr id="18" name="Image 0" descr="preencoded.png">    </p:cNvPr>
+          <p:cNvPicPr>
+            <a:picLocks noChangeAspect="1"/>
+          </p:cNvPicPr>
+          <p:nvPr/>
+        </p:nvPicPr>
+        <p:blipFill>
+          <a:blip r:embed="rId1"/>
+          <a:stretch>
+            <a:fillRect/>
+          </a:stretch>
+        </p:blipFill>
+        <p:spPr>
+          <a:xfrm>
+            <a:off x="9072321" y="128016"/>
+            <a:ext cx="201168" cy="201168"/>
+          </a:xfrm>
+          <a:prstGeom prst="rect">
+            <a:avLst/>
+          </a:prstGeom>
+        </p:spPr>
+      </p:pic>
+      <p:sp>
+        <p:nvSpPr>
+          <p:cNvPr id="19" name="Text 16"/>
+          <p:cNvSpPr txBox="1"/>
+          <p:nvPr/>
+        </p:nvSpPr>
+        <p:spPr>
+          <a:xfrm>
+            <a:off x="9328353" y="91440"/>
+            <a:ext cx="2278126" cy="274320"/>
+          </a:xfrm>
+          <a:prstGeom prst="rect">
+            <a:avLst/>
+          </a:prstGeom>
+          <a:noFill/>
+          <a:ln/>
+        </p:spPr>
+        <p:txBody>
+          <a:bodyPr wrap="square" lIns="0" tIns="0" rIns="0" bIns="0" rtlCol="0" anchor="ctr"/>
+          <a:lstStyle/>
+          <a:p>
+            <a:pPr indent="0" marL="0">
+              <a:buNone/>
+            </a:pPr>
+            <a:r>
+              <a:rPr lang="en-US" sz="1100" b="1" dirty="0">
+                <a:solidFill>
+                  <a:srgbClr val="075985"/>
+                </a:solidFill>
+                <a:latin typeface="Calibri" pitchFamily="34" charset="0"/>
+                <a:ea typeface="Calibri" pitchFamily="34" charset="-122"/>
+                <a:cs typeface="Calibri" pitchFamily="34" charset="-120"/>
+              </a:rPr>
+              <a:t>UNDERSTAND NOW</a:t>
+            </a:r>
+            <a:pPr indent="0" marL="0">
+              <a:buNone/>
+            </a:pPr>
+            <a:r>
+              <a:rPr lang="en-US" sz="1100" dirty="0">
+                <a:solidFill>
+                  <a:srgbClr val="075985"/>
+                </a:solidFill>
+                <a:latin typeface="Calibri" pitchFamily="34" charset="0"/>
+                <a:ea typeface="Calibri" pitchFamily="34" charset="-122"/>
+                <a:cs typeface="Calibri" pitchFamily="34" charset="-120"/>
+              </a:rPr>
+              <a:t> · fixed point</a:t>
+            </a:r>
+            <a:endParaRPr lang="en-US" sz="1100" dirty="0"/>
           </a:p>
         </p:txBody>
       </p:sp>
@@ -13554,6 +14613,133 @@
       </p:sp>
       <p:sp>
         <p:nvSpPr>
+          <p:cNvPr id="5" name="Shape 2"/>
+          <p:cNvSpPr/>
+          <p:nvPr/>
+        </p:nvSpPr>
+        <p:spPr>
+          <a:xfrm>
+            <a:off x="8944305" y="91440"/>
+            <a:ext cx="2698750" cy="274320"/>
+          </a:xfrm>
+          <a:prstGeom prst="rect">
+            <a:avLst/>
+          </a:prstGeom>
+          <a:solidFill>
+            <a:srgbClr val="E0F2FE"/>
+          </a:solidFill>
+          <a:ln w="12700">
+            <a:solidFill>
+              <a:srgbClr val="0369A1"/>
+            </a:solidFill>
+            <a:prstDash val="solid"/>
+          </a:ln>
+        </p:spPr>
+      </p:sp>
+      <p:sp>
+        <p:nvSpPr>
+          <p:cNvPr id="6" name="Shape 3"/>
+          <p:cNvSpPr/>
+          <p:nvPr/>
+        </p:nvSpPr>
+        <p:spPr>
+          <a:xfrm>
+            <a:off x="8944305" y="91440"/>
+            <a:ext cx="73152" cy="274320"/>
+          </a:xfrm>
+          <a:prstGeom prst="rect">
+            <a:avLst/>
+          </a:prstGeom>
+          <a:solidFill>
+            <a:srgbClr val="0369A1"/>
+          </a:solidFill>
+          <a:ln w="12700">
+            <a:solidFill>
+              <a:srgbClr val="0369A1"/>
+            </a:solidFill>
+            <a:prstDash val="solid"/>
+          </a:ln>
+        </p:spPr>
+      </p:sp>
+      <p:pic>
+        <p:nvPicPr>
+          <p:cNvPr id="7" name="Image 0" descr="preencoded.png">    </p:cNvPr>
+          <p:cNvPicPr>
+            <a:picLocks noChangeAspect="1"/>
+          </p:cNvPicPr>
+          <p:nvPr/>
+        </p:nvPicPr>
+        <p:blipFill>
+          <a:blip r:embed="rId1"/>
+          <a:stretch>
+            <a:fillRect/>
+          </a:stretch>
+        </p:blipFill>
+        <p:spPr>
+          <a:xfrm>
+            <a:off x="9072321" y="128016"/>
+            <a:ext cx="201168" cy="201168"/>
+          </a:xfrm>
+          <a:prstGeom prst="rect">
+            <a:avLst/>
+          </a:prstGeom>
+        </p:spPr>
+      </p:pic>
+      <p:sp>
+        <p:nvSpPr>
+          <p:cNvPr id="8" name="Text 4"/>
+          <p:cNvSpPr txBox="1"/>
+          <p:nvPr/>
+        </p:nvSpPr>
+        <p:spPr>
+          <a:xfrm>
+            <a:off x="9328353" y="91440"/>
+            <a:ext cx="2278126" cy="274320"/>
+          </a:xfrm>
+          <a:prstGeom prst="rect">
+            <a:avLst/>
+          </a:prstGeom>
+          <a:noFill/>
+          <a:ln/>
+        </p:spPr>
+        <p:txBody>
+          <a:bodyPr wrap="square" lIns="0" tIns="0" rIns="0" bIns="0" rtlCol="0" anchor="ctr"/>
+          <a:lstStyle/>
+          <a:p>
+            <a:pPr indent="0" marL="0">
+              <a:buNone/>
+            </a:pPr>
+            <a:r>
+              <a:rPr lang="en-US" sz="1100" b="1" dirty="0">
+                <a:solidFill>
+                  <a:srgbClr val="075985"/>
+                </a:solidFill>
+                <a:latin typeface="Calibri" pitchFamily="34" charset="0"/>
+                <a:ea typeface="Calibri" pitchFamily="34" charset="-122"/>
+                <a:cs typeface="Calibri" pitchFamily="34" charset="-120"/>
+              </a:rPr>
+              <a:t>UNDERSTAND NOW</a:t>
+            </a:r>
+            <a:pPr indent="0" marL="0">
+              <a:buNone/>
+            </a:pPr>
+            <a:r>
+              <a:rPr lang="en-US" sz="1100" dirty="0">
+                <a:solidFill>
+                  <a:srgbClr val="075985"/>
+                </a:solidFill>
+                <a:latin typeface="Calibri" pitchFamily="34" charset="0"/>
+                <a:ea typeface="Calibri" pitchFamily="34" charset="-122"/>
+                <a:cs typeface="Calibri" pitchFamily="34" charset="-120"/>
+              </a:rPr>
+              <a:t> · fixed point</a:t>
+            </a:r>
+            <a:endParaRPr lang="en-US" sz="1100" dirty="0"/>
+          </a:p>
+        </p:txBody>
+      </p:sp>
+      <p:sp>
+        <p:nvSpPr>
           <p:cNvPr id="25" name="Slide Number Placeholder 0"/>
           <p:cNvSpPr>
             <a:spLocks noGrp="1"/>
@@ -14197,6 +15383,158 @@
               <a:t>Resume, and watch the bytes of step_q8 grow by 40 (0x28) at every stop</a:t>
             </a:r>
             <a:endParaRPr lang="en-US" sz="2200" dirty="0"/>
+          </a:p>
+        </p:txBody>
+      </p:sp>
+      <p:sp>
+        <p:nvSpPr>
+          <p:cNvPr id="15" name="Shape 13"/>
+          <p:cNvSpPr/>
+          <p:nvPr/>
+        </p:nvSpPr>
+        <p:spPr>
+          <a:xfrm>
+            <a:off x="8894013" y="91440"/>
+            <a:ext cx="2749042" cy="274320"/>
+          </a:xfrm>
+          <a:prstGeom prst="rect">
+            <a:avLst/>
+          </a:prstGeom>
+          <a:solidFill>
+            <a:srgbClr val="FEF3C7"/>
+          </a:solidFill>
+          <a:ln w="12700">
+            <a:solidFill>
+              <a:srgbClr val="B45309"/>
+            </a:solidFill>
+            <a:prstDash val="solid"/>
+          </a:ln>
+        </p:spPr>
+      </p:sp>
+      <p:sp>
+        <p:nvSpPr>
+          <p:cNvPr id="16" name="Shape 14"/>
+          <p:cNvSpPr/>
+          <p:nvPr/>
+        </p:nvSpPr>
+        <p:spPr>
+          <a:xfrm>
+            <a:off x="8894013" y="91440"/>
+            <a:ext cx="27432" cy="274320"/>
+          </a:xfrm>
+          <a:prstGeom prst="rect">
+            <a:avLst/>
+          </a:prstGeom>
+          <a:solidFill>
+            <a:srgbClr val="B45309"/>
+          </a:solidFill>
+          <a:ln w="12700">
+            <a:solidFill>
+              <a:srgbClr val="B45309"/>
+            </a:solidFill>
+            <a:prstDash val="solid"/>
+          </a:ln>
+        </p:spPr>
+      </p:sp>
+      <p:sp>
+        <p:nvSpPr>
+          <p:cNvPr id="17" name="Shape 15"/>
+          <p:cNvSpPr/>
+          <p:nvPr/>
+        </p:nvSpPr>
+        <p:spPr>
+          <a:xfrm>
+            <a:off x="8948877" y="91440"/>
+            <a:ext cx="27432" cy="274320"/>
+          </a:xfrm>
+          <a:prstGeom prst="rect">
+            <a:avLst/>
+          </a:prstGeom>
+          <a:solidFill>
+            <a:srgbClr val="B45309"/>
+          </a:solidFill>
+          <a:ln w="12700">
+            <a:solidFill>
+              <a:srgbClr val="B45309"/>
+            </a:solidFill>
+            <a:prstDash val="solid"/>
+          </a:ln>
+        </p:spPr>
+      </p:sp>
+      <p:pic>
+        <p:nvPicPr>
+          <p:cNvPr id="18" name="Image 0" descr="preencoded.png">    </p:cNvPr>
+          <p:cNvPicPr>
+            <a:picLocks noChangeAspect="1"/>
+          </p:cNvPicPr>
+          <p:nvPr/>
+        </p:nvPicPr>
+        <p:blipFill>
+          <a:blip r:embed="rId1"/>
+          <a:stretch>
+            <a:fillRect/>
+          </a:stretch>
+        </p:blipFill>
+        <p:spPr>
+          <a:xfrm>
+            <a:off x="9022029" y="128016"/>
+            <a:ext cx="201168" cy="201168"/>
+          </a:xfrm>
+          <a:prstGeom prst="rect">
+            <a:avLst/>
+          </a:prstGeom>
+        </p:spPr>
+      </p:pic>
+      <p:sp>
+        <p:nvSpPr>
+          <p:cNvPr id="19" name="Text 16"/>
+          <p:cNvSpPr txBox="1"/>
+          <p:nvPr/>
+        </p:nvSpPr>
+        <p:spPr>
+          <a:xfrm>
+            <a:off x="9278061" y="91440"/>
+            <a:ext cx="2328418" cy="274320"/>
+          </a:xfrm>
+          <a:prstGeom prst="rect">
+            <a:avLst/>
+          </a:prstGeom>
+          <a:noFill/>
+          <a:ln/>
+        </p:spPr>
+        <p:txBody>
+          <a:bodyPr wrap="square" lIns="0" tIns="0" rIns="0" bIns="0" rtlCol="0" anchor="ctr"/>
+          <a:lstStyle/>
+          <a:p>
+            <a:pPr indent="0" marL="0">
+              <a:buNone/>
+            </a:pPr>
+            <a:r>
+              <a:rPr lang="en-US" sz="1100" b="1" dirty="0">
+                <a:solidFill>
+                  <a:srgbClr val="92400E"/>
+                </a:solidFill>
+                <a:latin typeface="Calibri" pitchFamily="34" charset="0"/>
+                <a:ea typeface="Calibri" pitchFamily="34" charset="-122"/>
+                <a:cs typeface="Calibri" pitchFamily="34" charset="-120"/>
+              </a:rPr>
+              <a:t>USE NOW</a:t>
+            </a:r>
+            <a:pPr indent="0" marL="0">
+              <a:buNone/>
+            </a:pPr>
+            <a:r>
+              <a:rPr lang="en-US" sz="1100" dirty="0">
+                <a:solidFill>
+                  <a:srgbClr val="92400E"/>
+                </a:solidFill>
+                <a:latin typeface="Calibri" pitchFamily="34" charset="0"/>
+                <a:ea typeface="Calibri" pitchFamily="34" charset="-122"/>
+                <a:cs typeface="Calibri" pitchFamily="34" charset="-120"/>
+              </a:rPr>
+              <a:t> · the PRG32-QT debugger</a:t>
+            </a:r>
+            <a:endParaRPr lang="en-US" sz="1100" dirty="0"/>
           </a:p>
         </p:txBody>
       </p:sp>

--- a/en/slides/07-Computer_Architecture-Verm1_Part_1.pptx
+++ b/en/slides/07-Computer_Architecture-Verm1_Part_1.pptx
@@ -119,31 +119,31 @@
   <p:extLst>
     <p:ext uri="{521415D9-36F7-43E2-AB2F-B90AF26B5E84}">
       <p14:sectionLst xmlns:p14="http://schemas.microsoft.com/office/powerpoint/2010/main">
-        <p14:section name="Opening" id="{209ee759-7dc8-86cd-b97b-574b7ad131d4}">
+        <p14:section name="Opening" id="{3709cbc3-e499-d66a-244b-a0f2a23dc34d}">
           <p14:sldIdLst>
             <p14:sldId id="256"/>
             <p14:sldId id="257"/>
           </p14:sldIdLst>
         </p14:section>
-        <p14:section name="The project" id="{60621edd-8256-7cfd-8648-b3d1d74edd7b}">
+        <p14:section name="The project" id="{0dd2908b-f6cd-6bdc-f027-5a18b7f0faeb}">
           <p14:sldIdLst>
             <p14:sldId id="258"/>
             <p14:sldId id="259"/>
             <p14:sldId id="260"/>
           </p14:sldIdLst>
         </p14:section>
-        <p14:section name="Step 2: a grid and a head" id="{2c7bf4a0-8446-a32b-c34d-70c20d914b26}">
+        <p14:section name="Step 2: a grid and a head" id="{3923be38-552a-b585-02aa-f54e3392c9d2}">
           <p14:sldIdLst>
             <p14:sldId id="261"/>
           </p14:sldIdLst>
         </p14:section>
-        <p14:section name="Step 3: movement" id="{9e7993c6-dd0b-2763-075f-9707e229bc6d}">
+        <p14:section name="Step 3: movement" id="{ab466296-d8fc-fedd-7f44-589e360de609}">
           <p14:sldIdLst>
             <p14:sldId id="262"/>
             <p14:sldId id="263"/>
           </p14:sldIdLst>
         </p14:section>
-        <p14:section name="Step 4: look inside with PRG32-QT" id="{6719e2dc-dace-1fe1-bb7b-fb639d926ed1}">
+        <p14:section name="Step 4: look inside with PRG32-QT" id="{8e592514-79bc-2ef0-a3d7-677a0485f2c7}">
           <p14:sldIdLst>
             <p14:sldId id="264"/>
             <p14:sldId id="265"/>

--- a/en/slides/07-Computer_Architecture-Verm1_Part_1.pptx
+++ b/en/slides/07-Computer_Architecture-Verm1_Part_1.pptx
@@ -119,31 +119,31 @@
   <p:extLst>
     <p:ext uri="{521415D9-36F7-43E2-AB2F-B90AF26B5E84}">
       <p14:sectionLst xmlns:p14="http://schemas.microsoft.com/office/powerpoint/2010/main">
-        <p14:section name="Opening" id="{3709cbc3-e499-d66a-244b-a0f2a23dc34d}">
+        <p14:section name="Opening" id="{155188c2-76ee-db71-7610-c55b1cdc5fa8}">
           <p14:sldIdLst>
             <p14:sldId id="256"/>
             <p14:sldId id="257"/>
           </p14:sldIdLst>
         </p14:section>
-        <p14:section name="The project" id="{0dd2908b-f6cd-6bdc-f027-5a18b7f0faeb}">
+        <p14:section name="The project" id="{cbf3c7be-b859-eacf-4a11-664c28ee7897}">
           <p14:sldIdLst>
             <p14:sldId id="258"/>
             <p14:sldId id="259"/>
             <p14:sldId id="260"/>
           </p14:sldIdLst>
         </p14:section>
-        <p14:section name="Step 2: a grid and a head" id="{3923be38-552a-b585-02aa-f54e3392c9d2}">
+        <p14:section name="Step 2: a grid and a head" id="{778af047-b9c5-fef2-56bf-6c0fd9212f84}">
           <p14:sldIdLst>
             <p14:sldId id="261"/>
           </p14:sldIdLst>
         </p14:section>
-        <p14:section name="Step 3: movement" id="{ab466296-d8fc-fedd-7f44-589e360de609}">
+        <p14:section name="Step 3: movement" id="{c75e558f-a8b5-02f3-cfec-8aad82a94d1a}">
           <p14:sldIdLst>
             <p14:sldId id="262"/>
             <p14:sldId id="263"/>
           </p14:sldIdLst>
         </p14:section>
-        <p14:section name="Step 4: look inside with PRG32-QT" id="{8e592514-79bc-2ef0-a3d7-677a0485f2c7}">
+        <p14:section name="Step 4: look inside with PRG32-QT" id="{31fd88ec-6320-5a84-06c9-997ceaa7c9b4}">
           <p14:sldIdLst>
             <p14:sldId id="264"/>
             <p14:sldId id="265"/>
@@ -556,7 +556,7 @@
           <a:p>
             <a:r>
               <a:rPr lang="en-US" dirty="0"/>
-              <a:t>The project of the course starts here. This is a tutorial, not a lecture: you type a program, step by step, and at the end it runs. It uses only what the lectures from 02 to 06 have taught: registers and memory, colours and strings as numbers, comparisons and shifts, fixed point. The picture on the cover is what you will have on your screen in two hours: a title and a green square, the head of the worm, that crosses the screen by itself. The reference implementation was contributed by Giuseppe Coviello.
+              <a:t>The course project begins here. This is a tutorial rather than a lecture: a program is written step by step, and at the end it runs. It draws exclusively on Lectures 02 to 06: registers and memory, colours and strings as numbers, comparisons and shifts, fixed point. The cover shows the state of the screen two hours from now: a title and a green square, the head of the worm, crossing the screen unaided. The purpose of the session is integration: concepts studied separately must now cooperate within one program. The reference implementation was contributed by Giuseppe Coviello.
 Learning status: UNDERSTAND NOW, by the end of this lecture you explain it, trace it and apply it on your own; USE NOW, you follow and use the recipe today; how it works inside is explained later, or is not part of the course; UNDERSTAND LATER, recognise the name and what it is for; a later lecture explains it. A slide without a badge is context: a story, an example, a question, an exercise.
 Learning status of this lecture. UNDERSTAND NOW: the Verm1 project; the init, update, draw contract; a colour is a number; arrays in memory; .text, .rodata, .data; address, value, load, store; why ra is saved; shifts as multiplications; fixed point; pseudo-instructions; little-endian byte order. USE NOW: the PRG32 tools, the PRG32-QT debugger (used, not studied, in this course). UNDERSTAND LATER: instruction formats (Lecture 19). A slide without a badge is context: a story, an example, a question, an exercise.
 For the lecturer: First project tutorial. It uses only Lectures 02 to 06: registers, load and store, calls (02), strings and colours (04), integers, comparisons and wrap-around (05), fixed point (06), and a little history (03). The students type the program themselves; the reference file is verm1/verm1_part1.S. Everything on the code slides is read from that file, which is built and run automatically.</a:t>
@@ -647,7 +647,7 @@
           <a:p>
             <a:r>
               <a:rPr lang="en-US" dirty="0"/>
-              <a:t>The memory view shows 128 bytes in hexadecimal starting from the address you typed. A word occupies four bytes, least significant first: when step_q8 is 240 you read F0 00 00 00. This is the little-endian order of Lecture 04, seen live. The variables are in memory in the order of the file: head_x, head_y, step_q8, so the head's column is eight bytes before the fraction. The debugger only observes: to change the program you edit, build and run.
+              <a:t>The memory view displays 128 bytes in hexadecimal from the address entered. A word occupies four bytes, least significant first: when step_q8 holds 240 the view shows F0 00 00 00. This is the little-endian order of Lecture 04, now observed directly. Variables appear in memory in the order in which the file declares them, head_x, head_y, step_q8, so the column of the head lies eight bytes before the accumulator. The debugger only observes; to change the program one edits, builds and runs again.
 UNDERSTAND NOW: little-endian byte order.
 For the lecturer: Byte order: Lecture 04. In the file the order is head_x, head_y, step_q8, each four bytes: if step_q8 is at address A, head_x is at A - 8.</a:t>
             </a:r>
@@ -737,8 +737,8 @@
           <a:p>
             <a:r>
               <a:rPr lang="en-US" dirty="0"/>
-              <a:t>64 out of 256 is one quarter of a cell per frame. How many quarters make a whole cell? The two large numbers are distractors: 64 is the speed itself, and 256 is the size of a cell in the units of the timer.
-Apply the two formulas of the grid: x is the column times 8; y is the row times 8, plus the 8 pixels of the title line. The option that forgets the title line is the most common mistake.
+              <a:t>For the first question: 64 out of 256 is one quarter of a cell per frame, and the question is how many quarters make a whole cell. The two large numbers are distractors: 64 is the speed itself, and 256 is the size of a cell in the units of the accumulator.
+For the second, the two grid formulas apply: x is the column times 8; y is the row times 8 plus the 8 pixels of the title line. The option that omits the title line represents the most common error.
 For the lecturer: 1. Answer: B. 64/256 = 1/4 of a cell per frame: a whole cell every 4 frames.
 2. Answer: C. x = 10 x 8 = 80; y = 3 x 8 + 8 = 32.</a:t>
             </a:r>
@@ -828,7 +828,7 @@
           <a:p>
             <a:r>
               <a:rPr lang="en-US" dirty="0"/>
-              <a:t>It is not a matter of length. A call writes the return address into ra, so a function that makes calls must keep its own ra safe on the stack. verm1_update is a leaf: it calls nothing, and ra still holds the right address when it reaches ret.
+              <a:t>The answer does not depend on the length of the function. A call writes the return address into ra, so a function that makes calls must preserve its own ra on the stack. verm1_update is a leaf function: it calls nothing, so ra still holds the correct address when ret is reached, and no stack frame is needed.
 For the lecturer: Answer: B. A call writes the return address in ra. A function that makes calls must keep its own ra safe on the stack; a leaf function need not.</a:t>
             </a:r>
             <a:endParaRPr lang="en-US" dirty="0"/>
@@ -917,7 +917,7 @@
           <a:p>
             <a:r>
               <a:rPr lang="en-US" dirty="0"/>
-              <a:t>Where you are. You have a cartridge that runs and that you understand line by line. It already has the shape of every game: a state in memory, a rule that changes it at every frame, and a function that draws it. What is missing is the player: the head goes where it wants. The next four lectures give the tools to read the joystick and to decide, bits, masks and tables, and Part 2 uses them to add steering, food and a score.
+              <a:t>The current position. The student has a cartridge that runs and is understood line by line. It already exhibits the structure common to every game: a state in memory, a rule that transforms it at every frame, and a function that renders it. What is missing is the player: the head goes where it pleases. The next four lectures supply the means to read the joystick and to make decisions, namely bits, masks, Boolean rules and tables, and Part 2 applies them to add steering, food and a score.
 Learning status, recap. UNDERSTAND NOW: the Verm1 project; the init, update, draw contract; a colour is a number; arrays in memory; .text, .rodata, .data; address, value, load, store; why ra is saved; shifts as multiplications; fixed point; pseudo-instructions; little-endian byte order. USE NOW: the PRG32 tools, the PRG32-QT debugger (used, not studied, in this course). UNDERSTAND LATER: instruction formats (Lecture 19). A slide without a badge is context: a story, an example, a question, an exercise.
 For the lecturer: Reference file for this part: verm1/verm1_part1.S (78 lines). If a student's program does not work at the start of Part 2, they start from this file.</a:t>
             </a:r>
@@ -1007,7 +1007,7 @@
           <a:p>
             <a:r>
               <a:rPr lang="en-US" dirty="0"/>
-              <a:t>Five results. A cartridge of your own, built from one file that you typed. A title, a grid of 40 by 24 cells and the head drawn in one of them. The head moving by itself, one cell at a time, at a speed set in fixed point. A world without edges, in which the head that leaves on the right comes back from the left. And a habit, which matters more than the program: the working loop of edit, build, run, look, with the debugger as a normal tool.</a:t>
+              <a:t>Five outcomes. A cartridge of the student's own, built from a single file typed by hand. A title, a grid of 40 by 24 cells, and the head drawn in one of them. The head moving autonomously, one cell at a time, at a speed expressed in fixed point. A world without edges, in which the head that leaves on the right re-enters on the left. And, more important than the program itself, a method: the working loop of edit, build, run and observe, with the debugger as an ordinary instrument rather than a last resort.</a:t>
             </a:r>
             <a:endParaRPr lang="en-US" dirty="0"/>
           </a:p>
@@ -1095,7 +1095,7 @@
           <a:p>
             <a:r>
               <a:rPr lang="en-US" dirty="0"/>
-              <a:t>Verm1, read "vermone", is a tribute to Snake: a worm that moves on a grid, eats, grows and must not bite itself. The idea goes back to the arcade game Blockade of 1976 and became famous on the Nokia phones of 1997. It was chosen because it is small enough to be written from scratch in assembly and yet needs every topic of the course. You write every line; there is no engine underneath. The picture on the right is where you will arrive in Part 4.
+              <a:t>Verm1, pronounced "vermone", is a tribute to Snake: a worm moves on a grid, eats, grows, and must not collide with itself. The idea goes back to the arcade game Blockade of 1976 and achieved wide popularity on the Nokia phones of 1997. It was chosen because it is small enough to be written from scratch in assembly yet requires every topic of the course. Every line is written by the student, with no engine underneath. The picture on the right shows the destination, reached in Part 4.
 UNDERSTAND NOW: the Verm1 project.
 For the lecturer: Snake for the Nokia 6110 was written by Taneli Armanto. Verm1 is a tribute, not a copy: the name, the rules of detail and the look are ours. The reference implementation that the tutorials follow was contributed by Giuseppe Coviello.</a:t>
             </a:r>
@@ -1185,7 +1185,7 @@
           <a:p>
             <a:r>
               <a:rPr lang="en-US" dirty="0"/>
-              <a:t>The plan of the project. Each row is a tutorial, what you add in it and the lectures it uses. Part 1, today: a grid, a head, automatic movement. Part 2, Lecture 12: steering, food, a score. Part 3, Lecture 17: a body that grows and collisions. Part 4, Lecture 22: the finished game. Lecture 23 prepares the bundle for the Store. One rule, from the notes of the lecturer, applies to every part: never start with a program that does not run; if yours is broken, start from the reference file.
+              <a:t>The plan of the project. Each row is a tutorial, what it adds and the lectures on which it draws. Part 1, today: a grid, a head, autonomous movement. Part 2, Lecture 12: steering, food and a score. Part 3, Lecture 17: a growing body and collisions. Part 4, Lecture 22: the finished game. Lecture 23 prepares the bundle for the Store. One rule applies to every part: never begin from a program that does not run. A student whose file is broken starts again from the reference file, so that every session builds on a working foundation.
 UNDERSTAND NOW: the Verm1 project.
 For the lecturer: Each part ends with a program that runs. Never start a part with a program that does not: if yours is broken, start from the reference file of the previous part.</a:t>
             </a:r>
@@ -1275,7 +1275,7 @@
           <a:p>
             <a:r>
               <a:rPr lang="en-US" dirty="0"/>
-              <a:t>Nothing in today's program is new: each idea comes from a lecture. The registers, la, lw, sw, calls and the stack frame come from Lecture 02. Colours as RGB565 numbers and strings that end with a zero come from Lecture 04. Shifts used as multiplications, comparisons and wrapping around come from Lecture 05. Fixed point, a fraction kept as a scaled integer, comes from Lecture 06, and it becomes the speed of the worm. Keep this table open: when a line of code puzzles you, the third column tells you which lecture to reread.</a:t>
+              <a:t>Nothing in today's program is new: each idea is traceable to a lecture. Registers, la, lw, sw, procedure calls and the stack frame come from Lecture 02. Colours as RGB565 numbers and zero-terminated strings come from Lecture 04. Shifts as multiplications, comparisons and wrap-around come from Lecture 05. Fixed point, a fraction held as a scaled integer, comes from Lecture 06 and becomes the speed of the worm. The table should remain open throughout the session: when a line of code is puzzling, its third column indicates which lecture to revisit.</a:t>
             </a:r>
             <a:endParaRPr lang="en-US" dirty="0"/>
           </a:p>
@@ -1363,7 +1363,7 @@
           <a:p>
             <a:r>
               <a:rPr lang="en-US" dirty="0"/>
-              <a:t>The worm does not live in pixels: it lives in cells. A position is a column from 0 to 39 and a row from 0 to 23, and the head starts in column 5 of row 12, the bright cell in the drawing. To draw a cell its coordinates are turned into pixels: x is the column times 8, a shift left by 3; y is the row times 8 plus 8, because the title line comes first. Thinking in cells makes all the later rules simple: moving is adding 1, and two things collide when their cells are equal.
+              <a:t>The worm inhabits cells, not pixels. A position is a column from 0 to 39 and a row from 0 to 23, and the head starts in column 5 of row 12, the highlighted cell. To draw a cell, its coordinates are mapped to pixels: x is the column times 8, a left shift by 3; y is the row times 8 plus 8, to leave room for the title line. This change of coordinate system is a modelling decision with lasting benefits: in cell coordinates every later rule is simple, since moving is adding 1 and two objects collide exactly when their cells are equal.
 UNDERSTAND NOW: arrays in memory.
 For the lecturer: Draw the grid on the board and ask for the pixel coordinates of a few cells: (0,0) is at (0,8); (39,23) is at (312,192).</a:t>
             </a:r>
@@ -1453,7 +1453,7 @@
           <a:p>
             <a:r>
               <a:rPr lang="en-US" dirty="0"/>
-              <a:t>update runs about thirty times per second. At one cell per frame the head would cross the forty columns in little more than a second. We want a fraction of a cell per frame. So we keep a fraction in units of 1/256 of a cell, add the speed to it at every frame, and take a step each time a whole cell, 256, has accumulated. With SPEED_Q8 equal to 40 the head advances 40/256 of a cell per frame: one step about every six frames. The remainder is kept, so on average the speed is exact.
+              <a:t>update runs approximately thirty times per second. At one cell per frame the head would cross the forty columns in little more than a second, which is unplayable. A fraction of a cell per frame is required. The solution keeps an accumulator in units of 1/256 of a cell, adds the speed to it at every frame, and advances by one cell whenever a whole cell, 256 units, has accumulated. With SPEED_Q8 equal to 40, the head advances 40/256 of a cell per frame, one step roughly every six frames. Because the remainder is retained rather than discarded, the average speed is exact.
 UNDERSTAND NOW: fixed point.
 For the lecturer: This is the ball of Lecture 06, turned into a timer. The remainder is kept, so the average speed is exact: 256 frames give exactly 40 steps.</a:t>
             </a:r>
@@ -1543,7 +1543,7 @@
           <a:p>
             <a:r>
               <a:rPr lang="en-US" dirty="0"/>
-              <a:t>A trace by hand, the most useful exercise of the tutorial. At each frame 40 is added to the fraction. At frames 1 to 6 the sum stays below 256 and the head does not move. At frame 7 it reaches 280: a whole cell has accumulated, 256 is subtracted, 24 remains, and the head goes from column 5 to column 6. The steps come every six or seven frames, and the remainder carries the difference, like the extra day of a leap year. Fill in frames 8 to 12 yourself.
+              <a:t>A trace by hand, the most instructive exercise of the tutorial. At each frame 40 is added to the accumulator. During frames 1 to 6 the sum remains below 256 and the head does not move. At frame 7 it reaches 280: a whole cell has accumulated, 256 is subtracted, 24 remains, and the head moves from column 5 to column 6. Steps thus occur every six or seven frames, and the remainder absorbs the difference, much as the extra day of a leap year reconciles the calendar with the solar year. Frames 8 to 12 are left to be completed.
 UNDERSTAND NOW: fixed point.
 For the lecturer: After 64 frames the sum is 64 x 40 = 2560 = 10 x 256: ten steps, head in column 15, exactly what the screenshot shows. Ask the students to fill in frames 8 to 12.</a:t>
             </a:r>
@@ -1633,7 +1633,7 @@
           <a:p>
             <a:r>
               <a:rPr lang="en-US" dirty="0"/>
-              <a:t>A precise procedure. Enable the debug mode in Settings and run the cartridge. Press Update: the listing shows verm1_update. Click in the gutter beside its first instruction to set a breakpoint: the program stops there at the next frame. Now step, one instruction at a time, and watch the registers. After the two instructions that implement la, t0 holds an address: type it in the Memory field and you will see the bytes of step_q8. Each Resume runs one frame, and the value grows by 40, 0x28.
+              <a:t>A precise debugging procedure. Debug mode is enabled in Settings and the cartridge run. Update displays verm1_update in the listing; a click in the gutter beside its first instruction sets a breakpoint, at which the program halts on the next frame. Stepping one instruction at a time, the registers are observed. After the two instructions into which la expands, t0 holds an address; entering it in the Memory field reveals the bytes of step_q8. Each Resume executes one frame, and the value increases by 40, that is, 0x28.
 USE NOW: the PRG32-QT debugger (used, not studied, in this course).
 For the lecturer: From the PRG32-QT debugging guide: pause, resume, step; Init / Update / Draw / PC views; gutter breakpoints; a 128-byte memory view. Resume ignores the current breakpoint once, so each press of Resume runs one whole frame.</a:t>
             </a:r>
@@ -2752,7 +2752,7 @@
                 <a:ea typeface="Calibri" pitchFamily="34" charset="-122"/>
                 <a:cs typeface="Calibri" pitchFamily="34" charset="-120"/>
               </a:rPr>
-              <a:t>07-Computer_Architecture-Verm1_Part_1-Code.pptx</a:t>
+              <a:t>07-Computer_Architecture-Verm1_Part_1-Lab.pptx</a:t>
             </a:r>
             <a:endParaRPr lang="en-US" sz="1300" dirty="0"/>
           </a:p>

--- a/en/slides/07-Computer_Architecture-Verm1_Part_1.pptx
+++ b/en/slides/07-Computer_Architecture-Verm1_Part_1.pptx
@@ -119,31 +119,31 @@
   <p:extLst>
     <p:ext uri="{521415D9-36F7-43E2-AB2F-B90AF26B5E84}">
       <p14:sectionLst xmlns:p14="http://schemas.microsoft.com/office/powerpoint/2010/main">
-        <p14:section name="Opening" id="{155188c2-76ee-db71-7610-c55b1cdc5fa8}">
+        <p14:section name="Opening" id="{33e71a42-cd2c-2624-0c80-a3208d0a659c}">
           <p14:sldIdLst>
             <p14:sldId id="256"/>
             <p14:sldId id="257"/>
           </p14:sldIdLst>
         </p14:section>
-        <p14:section name="The project" id="{cbf3c7be-b859-eacf-4a11-664c28ee7897}">
+        <p14:section name="The project" id="{8736973b-4f9d-2e1d-3246-a81031780774}">
           <p14:sldIdLst>
             <p14:sldId id="258"/>
             <p14:sldId id="259"/>
             <p14:sldId id="260"/>
           </p14:sldIdLst>
         </p14:section>
-        <p14:section name="Step 2: a grid and a head" id="{778af047-b9c5-fef2-56bf-6c0fd9212f84}">
+        <p14:section name="Step 2: a grid and a head" id="{d3ef9243-fc71-aec3-450b-1106c44cadc5}">
           <p14:sldIdLst>
             <p14:sldId id="261"/>
           </p14:sldIdLst>
         </p14:section>
-        <p14:section name="Step 3: movement" id="{c75e558f-a8b5-02f3-cfec-8aad82a94d1a}">
+        <p14:section name="Step 3: movement" id="{11fee4c2-1a59-4044-f506-22b42e690154}">
           <p14:sldIdLst>
             <p14:sldId id="262"/>
             <p14:sldId id="263"/>
           </p14:sldIdLst>
         </p14:section>
-        <p14:section name="Step 4: look inside with PRG32-QT" id="{31fd88ec-6320-5a84-06c9-997ceaa7c9b4}">
+        <p14:section name="Step 4: look inside with PRG32-QT" id="{b5626dbc-999d-4faf-a1d8-8edb9be8d7a5}">
           <p14:sldIdLst>
             <p14:sldId id="264"/>
             <p14:sldId id="265"/>

--- a/en/slides/07-Computer_Architecture-Verm1_Part_1.pptx
+++ b/en/slides/07-Computer_Architecture-Verm1_Part_1.pptx
@@ -119,31 +119,31 @@
   <p:extLst>
     <p:ext uri="{521415D9-36F7-43E2-AB2F-B90AF26B5E84}">
       <p14:sectionLst xmlns:p14="http://schemas.microsoft.com/office/powerpoint/2010/main">
-        <p14:section name="Opening" id="{33e71a42-cd2c-2624-0c80-a3208d0a659c}">
+        <p14:section name="Opening" id="{f6042cb6-e107-0ec0-b1bb-599ad2cc8089}">
           <p14:sldIdLst>
             <p14:sldId id="256"/>
             <p14:sldId id="257"/>
           </p14:sldIdLst>
         </p14:section>
-        <p14:section name="The project" id="{8736973b-4f9d-2e1d-3246-a81031780774}">
+        <p14:section name="The project" id="{f76d929f-129b-35c7-bf25-f340d0e4a636}">
           <p14:sldIdLst>
             <p14:sldId id="258"/>
             <p14:sldId id="259"/>
             <p14:sldId id="260"/>
           </p14:sldIdLst>
         </p14:section>
-        <p14:section name="Step 2: a grid and a head" id="{d3ef9243-fc71-aec3-450b-1106c44cadc5}">
+        <p14:section name="Step 2: a grid and a head" id="{eaaa61c1-7165-447f-f3e7-8416a4790873}">
           <p14:sldIdLst>
             <p14:sldId id="261"/>
           </p14:sldIdLst>
         </p14:section>
-        <p14:section name="Step 3: movement" id="{11fee4c2-1a59-4044-f506-22b42e690154}">
+        <p14:section name="Step 3: movement" id="{c30e6aa1-4279-362b-8fca-606b3c08360b}">
           <p14:sldIdLst>
             <p14:sldId id="262"/>
             <p14:sldId id="263"/>
           </p14:sldIdLst>
         </p14:section>
-        <p14:section name="Step 4: look inside with PRG32-QT" id="{b5626dbc-999d-4faf-a1d8-8edb9be8d7a5}">
+        <p14:section name="Step 4: look inside with PRG32-QT" id="{70f741ab-d8e7-8016-1383-ffb146e15719}">
           <p14:sldIdLst>
             <p14:sldId id="264"/>
             <p14:sldId id="265"/>
@@ -559,6 +559,8 @@
               <a:t>The course project begins here. This is a tutorial rather than a lecture: a program is written step by step, and at the end it runs. It draws exclusively on Lectures 02 to 06: registers and memory, colours and strings as numbers, comparisons and shifts, fixed point. The cover shows the state of the screen two hours from now: a title and a green square, the head of the worm, crossing the screen unaided. The purpose of the session is integration: concepts studied separately must now cooperate within one program. The reference implementation was contributed by Giuseppe Coviello.
 Learning status: UNDERSTAND NOW, by the end of this lecture you explain it, trace it and apply it on your own; USE NOW, you follow and use the recipe today; how it works inside is explained later, or is not part of the course; UNDERSTAND LATER, recognise the name and what it is for; a later lecture explains it. A slide without a badge is context: a story, an example, a question, an exercise.
 Learning status of this lecture. UNDERSTAND NOW: the Verm1 project; the init, update, draw contract; a colour is a number; arrays in memory; .text, .rodata, .data; address, value, load, store; why ra is saved; shifts as multiplications; fixed point; pseudo-instructions; little-endian byte order. USE NOW: the PRG32 tools, the PRG32-QT debugger (used, not studied, in this course). UNDERSTAND LATER: instruction formats (Lecture 19). A slide without a badge is context: a story, an example, a question, an exercise.
+Roadmap. Today's outcomes: (1) build a cartridge from an empty file: a grid, a title and a moving head; (2) place constants and variables in the right section, .rodata or .data; (3) control a speed with a fixed-point accumulator. Builds on: the init, update, draw contract (Lecture 02); a colour is a number (Lecture 04); arrays in memory (Lecture 04); address, value, load, store (Lecture 02); why ra is saved (Lecture 02). Next: Lecture 08, Elements of Boolean Algebra.
+Bridge. In Lecture 02 step 2 saved ra on the stack before its calls, and lw t1, 0(t0) read a word at the address in t0. Today verm1_draw saves ra and verm1_update does not, and every variable of Verm1 is read with la and lw. Lecture 18 explains the stack and the calling convention; Lecture 19 names the addressing modes. Recall: Why does verm1_draw save ra while verm1_update does not?
 For the lecturer: First project tutorial. It uses only Lectures 02 to 06: registers, load and store, calls (02), strings and colours (04), integers, comparisons and wrap-around (05), fixed point (06), and a little history (03). The students type the program themselves; the reference file is verm1/verm1_part1.S. Everything on the code slides is read from that file, which is built and run automatically.</a:t>
             </a:r>
             <a:endParaRPr lang="en-US" dirty="0"/>
@@ -918,7 +920,7 @@
             <a:r>
               <a:rPr lang="en-US" dirty="0"/>
               <a:t>The current position. The student has a cartridge that runs and is understood line by line. It already exhibits the structure common to every game: a state in memory, a rule that transforms it at every frame, and a function that renders it. What is missing is the player: the head goes where it pleases. The next four lectures supply the means to read the joystick and to make decisions, namely bits, masks, Boolean rules and tables, and Part 2 applies them to add steering, food and a score.
-Learning status, recap. UNDERSTAND NOW: the Verm1 project; the init, update, draw contract; a colour is a number; arrays in memory; .text, .rodata, .data; address, value, load, store; why ra is saved; shifts as multiplications; fixed point; pseudo-instructions; little-endian byte order. USE NOW: the PRG32 tools, the PRG32-QT debugger (used, not studied, in this course). UNDERSTAND LATER: instruction formats (Lecture 19). A slide without a badge is context: a story, an example, a question, an exercise.
+Learning status, recap. UNDERSTAND NOW: the Verm1 project; the init, update, draw contract; a colour is a number; arrays in memory; .text, .rodata, .data; address, value, load, store; why ra is saved; shifts as multiplications; fixed point; pseudo-instructions; little-endian byte order. USE NOW: the PRG32 tools, the PRG32-QT debugger (used, not studied, in this course). UNDERSTAND LATER: instruction formats (Lecture 19). A slide without a badge is context: a story, an example, a question, an exercise. Closing thread: Numbers became positions, colours and a speed: the whole information block, in one running game. Next: the logic that will let the player steer it. Exit ticket (two to four minutes, alone, on paper): 1. Verm1 declares title: .asciz "VERM1" and head_x: .word 5. In which section does each belong, and why must head_x not be placed in .rodata? 2. step_q8 grows by SPEED_Q8 at every frame, and the head moves one cell each time it reaches 256. With SPEED_Q8 = 64, how many frames between two steps? With 128? Predict, then run.
 For the lecturer: Reference file for this part: verm1/verm1_part1.S (78 lines). If a student's program does not work at the start of Part 2, they start from this file.</a:t>
             </a:r>
             <a:endParaRPr lang="en-US" dirty="0"/>
